--- a/classes/parte-8-blue-team-deteccion-y-soc/192-deteccion-de-movimiento-lateral/clase-192-presentacion.pptx
+++ b/classes/parte-8-blue-team-deteccion-y-soc/192-deteccion-de-movimiento-lateral/clase-192-presentacion.pptx
@@ -17,6 +17,11 @@
     <p:sldId id="265" r:id="rId16"/>
     <p:sldId id="266" r:id="rId17"/>
     <p:sldId id="267" r:id="rId18"/>
+    <p:sldId id="268" r:id="rId19"/>
+    <p:sldId id="269" r:id="rId20"/>
+    <p:sldId id="270" r:id="rId21"/>
+    <p:sldId id="271" r:id="rId22"/>
+    <p:sldId id="272" r:id="rId23"/>
   </p:sldIdLst>
   <p:sldSz cx="9144000" cy="6858000" type="screen4x3"/>
   <p:notesSz cx="6858000" cy="9144000"/>
@@ -3198,7 +3203,7 @@
                   <a:srgbClr val="0B3D2E"/>
                 </a:solidFill>
               </a:rPr>
-              <a:t>⚠️ Errores comunes</a:t>
+              <a:t>🧰 Herramientas y preparación</a:t>
             </a:r>
           </a:p>
         </p:txBody>
@@ -3236,67 +3241,82 @@
                   <a:srgbClr val="22282E"/>
                 </a:solidFill>
               </a:rPr>
-              <a:t>•  Falsos positivos con admins de TI — Sin baseline de administración; excluye cuentas/hosts legítimos</a:t>
-            </a:r>
-          </a:p>
-          <a:p>
-            <a:pPr>
-              <a:spcAft>
-                <a:spcPts val="600"/>
-              </a:spcAft>
-            </a:pPr>
-            <a:r>
-              <a:rPr sz="1500">
-                <a:solidFill>
-                  <a:srgbClr val="22282E"/>
-                </a:solidFill>
-              </a:rPr>
-              <a:t>•  No detectas WMI/WinRM — Faltan Sysmon y auditoría de proceso; habilítalos en todos los hosts</a:t>
-            </a:r>
-          </a:p>
-          <a:p>
-            <a:pPr>
-              <a:spcAft>
-                <a:spcPts val="600"/>
-              </a:spcAft>
-            </a:pPr>
-            <a:r>
-              <a:rPr sz="1500">
-                <a:solidFill>
-                  <a:srgbClr val="22282E"/>
-                </a:solidFill>
-              </a:rPr>
-              <a:t>•  PtH invisible — No correlacionas NTLM vs Kerberos; añade lógica de logon anómalo</a:t>
-            </a:r>
-          </a:p>
-          <a:p>
-            <a:pPr>
-              <a:spcAft>
-                <a:spcPts val="600"/>
-              </a:spcAft>
-            </a:pPr>
-            <a:r>
-              <a:rPr sz="1500">
-                <a:solidFill>
-                  <a:srgbClr val="22282E"/>
-                </a:solidFill>
-              </a:rPr>
-              <a:t>•  Solo miras un host — El movimiento lateral es multi-host; correlaciona en el SIEM</a:t>
-            </a:r>
-          </a:p>
-          <a:p>
-            <a:pPr>
-              <a:spcAft>
-                <a:spcPts val="600"/>
-              </a:spcAft>
-            </a:pPr>
-            <a:r>
-              <a:rPr sz="1500">
-                <a:solidFill>
-                  <a:srgbClr val="22282E"/>
-                </a:solidFill>
-              </a:rPr>
-              <a:t>•  Ruido de escáneres internos — Herramientas de inventario parecen laterales; añádelas a allowlist</a:t>
+              <a:t>•  En laboratorio aislado con un dominio de pruebas:</a:t>
+            </a:r>
+          </a:p>
+          <a:p>
+            <a:pPr>
+              <a:spcAft>
+                <a:spcPts val="600"/>
+              </a:spcAft>
+            </a:pPr>
+            <a:r>
+              <a:rPr sz="1500">
+                <a:solidFill>
+                  <a:srgbClr val="22282E"/>
+                </a:solidFill>
+              </a:rPr>
+              <a:t>•  Sysmon y auditoría avanzada en varios Windows unidos a un AD de laboratorio.</a:t>
+            </a:r>
+          </a:p>
+          <a:p>
+            <a:pPr>
+              <a:spcAft>
+                <a:spcPts val="600"/>
+              </a:spcAft>
+            </a:pPr>
+            <a:r>
+              <a:rPr sz="1500">
+                <a:solidFill>
+                  <a:srgbClr val="22282E"/>
+                </a:solidFill>
+              </a:rPr>
+              <a:t>•  Herramientas para generar la telemetría: PsExec (Sysinternals), wmic, PowerShell Remoting; y, con fines de laboratorio, utilidades como Mimikatz/CrackMapExec para simular PtH.</a:t>
+            </a:r>
+          </a:p>
+          <a:p>
+            <a:pPr>
+              <a:spcAft>
+                <a:spcPts val="600"/>
+              </a:spcAft>
+            </a:pPr>
+            <a:r>
+              <a:rPr sz="1500">
+                <a:solidFill>
+                  <a:srgbClr val="22282E"/>
+                </a:solidFill>
+              </a:rPr>
+              <a:t>•  Tu SIEM recibiendo los eventos de todos los hosts.</a:t>
+            </a:r>
+          </a:p>
+          <a:p>
+            <a:pPr>
+              <a:spcAft>
+                <a:spcPts val="600"/>
+              </a:spcAft>
+            </a:pPr>
+            <a:r>
+              <a:rPr sz="1500">
+                <a:solidFill>
+                  <a:srgbClr val="22282E"/>
+                </a:solidFill>
+              </a:rPr>
+              <a:t>•  Opcional: BloodHound para razonar sobre rutas de ataque de identidad.</a:t>
+            </a:r>
+          </a:p>
+          <a:p>
+            <a:pPr>
+              <a:spcAft>
+                <a:spcPts val="600"/>
+              </a:spcAft>
+            </a:pPr>
+            <a:r>
+              <a:rPr sz="1500">
+                <a:solidFill>
+                  <a:srgbClr val="22282E"/>
+                </a:solidFill>
+              </a:rPr>
+              <a:t>•  Ejecuta las técnicas ofensivas solo contra tus propias máquinas y con conocimiento pleno.</a:t>
             </a:r>
           </a:p>
         </p:txBody>
@@ -3347,7 +3367,7 @@
                   <a:srgbClr val="0B3D2E"/>
                 </a:solidFill>
               </a:rPr>
-              <a:t>❓ Preguntas frecuentes</a:t>
+              <a:t>🧪 Laboratorio guiado — Sigue el rastro lateral</a:t>
             </a:r>
           </a:p>
         </p:txBody>
@@ -3385,82 +3405,97 @@
                   <a:srgbClr val="22282E"/>
                 </a:solidFill>
               </a:rPr>
-              <a:t>•  ❓ ¿Cómo separo un admin legítimo de un atacante?</a:t>
-            </a:r>
-          </a:p>
-          <a:p>
-            <a:pPr>
-              <a:spcAft>
-                <a:spcPts val="600"/>
-              </a:spcAft>
-            </a:pPr>
-            <a:r>
-              <a:rPr sz="1500">
-                <a:solidFill>
-                  <a:srgbClr val="22282E"/>
-                </a:solidFill>
-              </a:rPr>
-              <a:t>•  Con baseline y contexto: quién administra qué, desde dónde y cuándo. Un logon administrativo de una workstation a otra fuera de horario, sin ticket de cambio, es sospechoso aunque use credenciales válidas.</a:t>
-            </a:r>
-          </a:p>
-          <a:p>
-            <a:pPr>
-              <a:spcAft>
-                <a:spcPts val="600"/>
-              </a:spcAft>
-            </a:pPr>
-            <a:r>
-              <a:rPr sz="1500">
-                <a:solidFill>
-                  <a:srgbClr val="22282E"/>
-                </a:solidFill>
-              </a:rPr>
-              <a:t>•  ❓ ¿Es suficiente el endpoint para detectar movimiento lateral?</a:t>
-            </a:r>
-          </a:p>
-          <a:p>
-            <a:pPr>
-              <a:spcAft>
-                <a:spcPts val="600"/>
-              </a:spcAft>
-            </a:pPr>
-            <a:r>
-              <a:rPr sz="1500">
-                <a:solidFill>
-                  <a:srgbClr val="22282E"/>
-                </a:solidFill>
-              </a:rPr>
-              <a:t>•  Ayuda mucho (Sysmon, logon events), pero correlacionar con la red (SMB, conexiones entre hosts) da la imagen completa y detecta lo que un host silenciado ocultaría.</a:t>
-            </a:r>
-          </a:p>
-          <a:p>
-            <a:pPr>
-              <a:spcAft>
-                <a:spcPts val="600"/>
-              </a:spcAft>
-            </a:pPr>
-            <a:r>
-              <a:rPr sz="1500">
-                <a:solidFill>
-                  <a:srgbClr val="22282E"/>
-                </a:solidFill>
-              </a:rPr>
-              <a:t>•  ❓ ¿Detecto Pass-the-Hash directamente?</a:t>
-            </a:r>
-          </a:p>
-          <a:p>
-            <a:pPr>
-              <a:spcAft>
-                <a:spcPts val="600"/>
-              </a:spcAft>
-            </a:pPr>
-            <a:r>
-              <a:rPr sz="1500">
-                <a:solidFill>
-                  <a:srgbClr val="22282E"/>
-                </a:solidFill>
-              </a:rPr>
-              <a:t>•  No hay un "evento PtH", pero su firma es un patrón: logon NTLM tipo 3 con credenciales explícitas (4648) en contextos donde se esperaría Kerberos. Se detecta por anomalía.</a:t>
+              <a:t>•  Prepara el dominio. 1 DC + 2 workstations de laboratorio con Sysmon y auditoría de logon habilitada.</a:t>
+            </a:r>
+          </a:p>
+          <a:p>
+            <a:pPr>
+              <a:spcAft>
+                <a:spcPts val="600"/>
+              </a:spcAft>
+            </a:pPr>
+            <a:r>
+              <a:rPr sz="1500">
+                <a:solidFill>
+                  <a:srgbClr val="22282E"/>
+                </a:solidFill>
+              </a:rPr>
+              <a:t>•  Genera PsExec. Ejecuta un comando remoto benigno con PsExec desde host A a host B y observa: Event 7045 (servicio), 4624 tipo 3, accesos a \\B\ADMIN$.</a:t>
+            </a:r>
+          </a:p>
+          <a:p>
+            <a:pPr>
+              <a:spcAft>
+                <a:spcPts val="600"/>
+              </a:spcAft>
+            </a:pPr>
+            <a:r>
+              <a:rPr sz="1500">
+                <a:solidFill>
+                  <a:srgbClr val="22282E"/>
+                </a:solidFill>
+              </a:rPr>
+              <a:t>•  Genera WMI. Lanza wmic /node:B process call create "cmd /c whoami" y localiza el proceso hijo de WmiPrvSE.exe en Sysmon Event 1.</a:t>
+            </a:r>
+          </a:p>
+          <a:p>
+            <a:pPr>
+              <a:spcAft>
+                <a:spcPts val="600"/>
+              </a:spcAft>
+            </a:pPr>
+            <a:r>
+              <a:rPr sz="1500">
+                <a:solidFill>
+                  <a:srgbClr val="22282E"/>
+                </a:solidFill>
+              </a:rPr>
+              <a:t>•  Genera WinRM. Con Invoke-Command -ComputerName B observa procesos bajo wsmprovhost.exe.</a:t>
+            </a:r>
+          </a:p>
+          <a:p>
+            <a:pPr>
+              <a:spcAft>
+                <a:spcPts val="600"/>
+              </a:spcAft>
+            </a:pPr>
+            <a:r>
+              <a:rPr sz="1500">
+                <a:solidFill>
+                  <a:srgbClr val="22282E"/>
+                </a:solidFill>
+              </a:rPr>
+              <a:t>•  Simula PtH. En laboratorio, autentícate con hash a host B y detecta el 4624 NTLM tipo 3 sin actividad Kerberos previa coherente y con 4648.</a:t>
+            </a:r>
+          </a:p>
+          <a:p>
+            <a:pPr>
+              <a:spcAft>
+                <a:spcPts val="600"/>
+              </a:spcAft>
+            </a:pPr>
+            <a:r>
+              <a:rPr sz="1500">
+                <a:solidFill>
+                  <a:srgbClr val="22282E"/>
+                </a:solidFill>
+              </a:rPr>
+              <a:t>•  Detecta RDP. Inicia una sesión RDP y localiza 4624 tipo 10 más los eventos TerminalServices.</a:t>
+            </a:r>
+          </a:p>
+          <a:p>
+            <a:pPr>
+              <a:spcAft>
+                <a:spcPts val="600"/>
+              </a:spcAft>
+            </a:pPr>
+            <a:r>
+              <a:rPr sz="1500">
+                <a:solidFill>
+                  <a:srgbClr val="22282E"/>
+                </a:solidFill>
+              </a:rPr>
+              <a:t>•  Construye detecciones. Escribe reglas para: instalación de servicio remoto inusual, proceso hijo de WmiPrvSE lanzando shells, y logon NTLM tipo 3 desde workstation a workstation (patrón raro).</a:t>
             </a:r>
           </a:p>
         </p:txBody>
@@ -3511,7 +3546,7 @@
                   <a:srgbClr val="0B3D2E"/>
                 </a:solidFill>
               </a:rPr>
-              <a:t>🔗 Referencias</a:t>
+              <a:t>✍️ Ejercicios</a:t>
             </a:r>
           </a:p>
         </p:txBody>
@@ -3549,71 +3584,712 @@
                   <a:srgbClr val="22282E"/>
                 </a:solidFill>
               </a:rPr>
-              <a:t>•  MITRE ATT&amp;CK, Lateral Movement — &lt;https://attack.mitre.org/tactics/TA0008/&gt;</a:t>
-            </a:r>
-          </a:p>
-          <a:p>
-            <a:pPr>
-              <a:spcAft>
-                <a:spcPts val="600"/>
-              </a:spcAft>
-            </a:pPr>
-            <a:r>
-              <a:rPr sz="1500">
-                <a:solidFill>
-                  <a:srgbClr val="22282E"/>
-                </a:solidFill>
-              </a:rPr>
-              <a:t>•  Murdoch, D. Blue Team Handbook: SOC, SIEM, and Threat Hunting Use Cases.</a:t>
-            </a:r>
-          </a:p>
-          <a:p>
-            <a:pPr>
-              <a:spcAft>
-                <a:spcPts val="600"/>
-              </a:spcAft>
-            </a:pPr>
-            <a:r>
-              <a:rPr sz="1500">
-                <a:solidFill>
-                  <a:srgbClr val="22282E"/>
-                </a:solidFill>
-              </a:rPr>
-              <a:t>•  Microsoft, "Securing lateral movement paths" — &lt;https://learn.microsoft.com/&gt;</a:t>
-            </a:r>
-          </a:p>
-          <a:p>
-            <a:pPr>
-              <a:spcAft>
-                <a:spcPts val="600"/>
-              </a:spcAft>
-            </a:pPr>
-            <a:r>
-              <a:rPr sz="1500">
-                <a:solidFill>
-                  <a:srgbClr val="22282E"/>
-                </a:solidFill>
-              </a:rPr>
-              <a:t>•  SpecterOps, BloodHound docs — &lt;https://bloodhound.readthedocs.io/&gt;</a:t>
-            </a:r>
-          </a:p>
-          <a:p>
-            <a:pPr>
-              <a:spcAft>
-                <a:spcPts val="600"/>
-              </a:spcAft>
-            </a:pPr>
-            <a:r>
-              <a:rPr sz="1500">
-                <a:solidFill>
-                  <a:srgbClr val="22282E"/>
-                </a:solidFill>
-              </a:rPr>
-              <a:t>•  JPCERT/CC, "Detecting Lateral Movement through Tracking Event Logs" — &lt;https://jpcertcc.github.io/ToolAnalysisResultSheet/&gt;</a:t>
-            </a:r>
-          </a:p>
-        </p:txBody>
-      </p:sp>
+              <a:t>•  Mapea 5 técnicas de movimiento lateral a sus Event IDs/artefactos.</a:t>
+            </a:r>
+          </a:p>
+          <a:p>
+            <a:pPr>
+              <a:spcAft>
+                <a:spcPts val="600"/>
+              </a:spcAft>
+            </a:pPr>
+            <a:r>
+              <a:rPr sz="1500">
+                <a:solidFill>
+                  <a:srgbClr val="22282E"/>
+                </a:solidFill>
+              </a:rPr>
+              <a:t>•  Escribe una detección de "workstation-a-workstation SMB admin$" (patrón inusual).</a:t>
+            </a:r>
+          </a:p>
+          <a:p>
+            <a:pPr>
+              <a:spcAft>
+                <a:spcPts val="600"/>
+              </a:spcAft>
+            </a:pPr>
+            <a:r>
+              <a:rPr sz="1500">
+                <a:solidFill>
+                  <a:srgbClr val="22282E"/>
+                </a:solidFill>
+              </a:rPr>
+              <a:t>•  Diferencia el rastro de PsExec, WMI y WinRM en una tabla.</a:t>
+            </a:r>
+          </a:p>
+          <a:p>
+            <a:pPr>
+              <a:spcAft>
+                <a:spcPts val="600"/>
+              </a:spcAft>
+            </a:pPr>
+            <a:r>
+              <a:rPr sz="1500">
+                <a:solidFill>
+                  <a:srgbClr val="22282E"/>
+                </a:solidFill>
+              </a:rPr>
+              <a:t>•  Explica cómo detectarías Pass-the-Hash con eventos de logon.</a:t>
+            </a:r>
+          </a:p>
+          <a:p>
+            <a:pPr>
+              <a:spcAft>
+                <a:spcPts val="600"/>
+              </a:spcAft>
+            </a:pPr>
+            <a:r>
+              <a:rPr sz="1500">
+                <a:solidFill>
+                  <a:srgbClr val="22282E"/>
+                </a:solidFill>
+              </a:rPr>
+              <a:t>•  Diseña una baseline de administración legítima para tu entorno.</a:t>
+            </a:r>
+          </a:p>
+          <a:p>
+            <a:pPr>
+              <a:spcAft>
+                <a:spcPts val="600"/>
+              </a:spcAft>
+            </a:pPr>
+            <a:r>
+              <a:rPr sz="1500">
+                <a:solidFill>
+                  <a:srgbClr val="22282E"/>
+                </a:solidFill>
+              </a:rPr>
+              <a:t>•  Usa un grafo de logons para detectar un pivote anómalo.</a:t>
+            </a:r>
+          </a:p>
+        </p:txBody>
+      </p:sp>
+    </p:spTree>
+  </p:cSld>
+  <p:clrMapOvr>
+    <a:masterClrMapping/>
+  </p:clrMapOvr>
+</p:sld>
+</file>
+
+<file path=ppt/slides/slide13.xml><?xml version="1.0" encoding="utf-8"?>
+<p:sld xmlns:a="http://schemas.openxmlformats.org/drawingml/2006/main" xmlns:p="http://schemas.openxmlformats.org/presentationml/2006/main" xmlns:r="http://schemas.openxmlformats.org/officeDocument/2006/relationships">
+  <p:cSld>
+    <p:spTree>
+      <p:nvGrpSpPr>
+        <p:cNvPr id="1" name=""/>
+        <p:cNvGrpSpPr/>
+        <p:nvPr/>
+      </p:nvGrpSpPr>
+      <p:grpSpPr/>
+      <p:sp>
+        <p:nvSpPr>
+          <p:cNvPr id="2" name="TextBox 1"/>
+          <p:cNvSpPr txBox="1"/>
+          <p:nvPr/>
+        </p:nvSpPr>
+        <p:spPr>
+          <a:xfrm>
+            <a:off x="457200" y="320040"/>
+            <a:ext cx="8229600" cy="822960"/>
+          </a:xfrm>
+          <a:prstGeom prst="rect">
+            <a:avLst/>
+          </a:prstGeom>
+          <a:noFill/>
+        </p:spPr>
+        <p:txBody>
+          <a:bodyPr wrap="square">
+            <a:spAutoFit/>
+          </a:bodyPr>
+          <a:lstStyle/>
+          <a:p>
+            <a:r>
+              <a:rPr sz="2600" b="1">
+                <a:solidFill>
+                  <a:srgbClr val="0B3D2E"/>
+                </a:solidFill>
+              </a:rPr>
+              <a:t>📝 Reto verificable</a:t>
+            </a:r>
+          </a:p>
+        </p:txBody>
+      </p:sp>
+      <p:sp>
+        <p:nvSpPr>
+          <p:cNvPr id="3" name="TextBox 2"/>
+          <p:cNvSpPr txBox="1"/>
+          <p:nvPr/>
+        </p:nvSpPr>
+        <p:spPr>
+          <a:xfrm>
+            <a:off x="457200" y="1280160"/>
+            <a:ext cx="8229600" cy="4937760"/>
+          </a:xfrm>
+          <a:prstGeom prst="rect">
+            <a:avLst/>
+          </a:prstGeom>
+          <a:noFill/>
+        </p:spPr>
+        <p:txBody>
+          <a:bodyPr wrap="square">
+            <a:spAutoFit/>
+          </a:bodyPr>
+          <a:lstStyle/>
+          <a:p>
+            <a:pPr>
+              <a:spcAft>
+                <a:spcPts val="600"/>
+              </a:spcAft>
+            </a:pPr>
+            <a:r>
+              <a:rPr sz="1500">
+                <a:solidFill>
+                  <a:srgbClr val="22282E"/>
+                </a:solidFill>
+              </a:rPr>
+              <a:t>•  Genera y detecta al menos tres técnicas de movimiento lateral distintas en tu dominio de laboratorio, entregando por cada una la telemetría, la detección y la técnica ATT&amp;CK. Criterio de aceptación…</a:t>
+            </a:r>
+          </a:p>
+        </p:txBody>
+      </p:sp>
+    </p:spTree>
+  </p:cSld>
+  <p:clrMapOvr>
+    <a:masterClrMapping/>
+  </p:clrMapOvr>
+</p:sld>
+</file>
+
+<file path=ppt/slides/slide14.xml><?xml version="1.0" encoding="utf-8"?>
+<p:sld xmlns:a="http://schemas.openxmlformats.org/drawingml/2006/main" xmlns:p="http://schemas.openxmlformats.org/presentationml/2006/main" xmlns:r="http://schemas.openxmlformats.org/officeDocument/2006/relationships">
+  <p:cSld>
+    <p:spTree>
+      <p:nvGrpSpPr>
+        <p:cNvPr id="1" name=""/>
+        <p:cNvGrpSpPr/>
+        <p:nvPr/>
+      </p:nvGrpSpPr>
+      <p:grpSpPr/>
+      <p:sp>
+        <p:nvSpPr>
+          <p:cNvPr id="2" name="TextBox 1"/>
+          <p:cNvSpPr txBox="1"/>
+          <p:nvPr/>
+        </p:nvSpPr>
+        <p:spPr>
+          <a:xfrm>
+            <a:off x="457200" y="320040"/>
+            <a:ext cx="8229600" cy="822960"/>
+          </a:xfrm>
+          <a:prstGeom prst="rect">
+            <a:avLst/>
+          </a:prstGeom>
+          <a:noFill/>
+        </p:spPr>
+        <p:txBody>
+          <a:bodyPr wrap="square">
+            <a:spAutoFit/>
+          </a:bodyPr>
+          <a:lstStyle/>
+          <a:p>
+            <a:r>
+              <a:rPr sz="2600" b="1">
+                <a:solidFill>
+                  <a:srgbClr val="0B3D2E"/>
+                </a:solidFill>
+              </a:rPr>
+              <a:t>⚠️ Errores comunes</a:t>
+            </a:r>
+          </a:p>
+        </p:txBody>
+      </p:sp>
+      <p:sp>
+        <p:nvSpPr>
+          <p:cNvPr id="3" name="TextBox 2"/>
+          <p:cNvSpPr txBox="1"/>
+          <p:nvPr/>
+        </p:nvSpPr>
+        <p:spPr>
+          <a:xfrm>
+            <a:off x="457200" y="1280160"/>
+            <a:ext cx="8229600" cy="4937760"/>
+          </a:xfrm>
+          <a:prstGeom prst="rect">
+            <a:avLst/>
+          </a:prstGeom>
+          <a:noFill/>
+        </p:spPr>
+        <p:txBody>
+          <a:bodyPr wrap="square">
+            <a:spAutoFit/>
+          </a:bodyPr>
+          <a:lstStyle/>
+          <a:p>
+            <a:pPr>
+              <a:spcAft>
+                <a:spcPts val="600"/>
+              </a:spcAft>
+            </a:pPr>
+            <a:r>
+              <a:rPr sz="1500">
+                <a:solidFill>
+                  <a:srgbClr val="22282E"/>
+                </a:solidFill>
+              </a:rPr>
+              <a:t>•  Falsos positivos con admins de TI — Sin baseline de administración; excluye cuentas/hosts legítimos</a:t>
+            </a:r>
+          </a:p>
+          <a:p>
+            <a:pPr>
+              <a:spcAft>
+                <a:spcPts val="600"/>
+              </a:spcAft>
+            </a:pPr>
+            <a:r>
+              <a:rPr sz="1500">
+                <a:solidFill>
+                  <a:srgbClr val="22282E"/>
+                </a:solidFill>
+              </a:rPr>
+              <a:t>•  No detectas WMI/WinRM — Faltan Sysmon y auditoría de proceso; habilítalos en todos los hosts</a:t>
+            </a:r>
+          </a:p>
+          <a:p>
+            <a:pPr>
+              <a:spcAft>
+                <a:spcPts val="600"/>
+              </a:spcAft>
+            </a:pPr>
+            <a:r>
+              <a:rPr sz="1500">
+                <a:solidFill>
+                  <a:srgbClr val="22282E"/>
+                </a:solidFill>
+              </a:rPr>
+              <a:t>•  PtH invisible — No correlacionas NTLM vs Kerberos; añade lógica de logon anómalo</a:t>
+            </a:r>
+          </a:p>
+          <a:p>
+            <a:pPr>
+              <a:spcAft>
+                <a:spcPts val="600"/>
+              </a:spcAft>
+            </a:pPr>
+            <a:r>
+              <a:rPr sz="1500">
+                <a:solidFill>
+                  <a:srgbClr val="22282E"/>
+                </a:solidFill>
+              </a:rPr>
+              <a:t>•  Solo miras un host — El movimiento lateral es multi-host; correlaciona en el SIEM</a:t>
+            </a:r>
+          </a:p>
+          <a:p>
+            <a:pPr>
+              <a:spcAft>
+                <a:spcPts val="600"/>
+              </a:spcAft>
+            </a:pPr>
+            <a:r>
+              <a:rPr sz="1500">
+                <a:solidFill>
+                  <a:srgbClr val="22282E"/>
+                </a:solidFill>
+              </a:rPr>
+              <a:t>•  Ruido de escáneres internos — Herramientas de inventario parecen laterales; añádelas a allowlist</a:t>
+            </a:r>
+          </a:p>
+        </p:txBody>
+      </p:sp>
+    </p:spTree>
+  </p:cSld>
+  <p:clrMapOvr>
+    <a:masterClrMapping/>
+  </p:clrMapOvr>
+</p:sld>
+</file>
+
+<file path=ppt/slides/slide15.xml><?xml version="1.0" encoding="utf-8"?>
+<p:sld xmlns:a="http://schemas.openxmlformats.org/drawingml/2006/main" xmlns:p="http://schemas.openxmlformats.org/presentationml/2006/main" xmlns:r="http://schemas.openxmlformats.org/officeDocument/2006/relationships">
+  <p:cSld>
+    <p:spTree>
+      <p:nvGrpSpPr>
+        <p:cNvPr id="1" name=""/>
+        <p:cNvGrpSpPr/>
+        <p:nvPr/>
+      </p:nvGrpSpPr>
+      <p:grpSpPr/>
+      <p:sp>
+        <p:nvSpPr>
+          <p:cNvPr id="2" name="TextBox 1"/>
+          <p:cNvSpPr txBox="1"/>
+          <p:nvPr/>
+        </p:nvSpPr>
+        <p:spPr>
+          <a:xfrm>
+            <a:off x="457200" y="320040"/>
+            <a:ext cx="8229600" cy="822960"/>
+          </a:xfrm>
+          <a:prstGeom prst="rect">
+            <a:avLst/>
+          </a:prstGeom>
+          <a:noFill/>
+        </p:spPr>
+        <p:txBody>
+          <a:bodyPr wrap="square">
+            <a:spAutoFit/>
+          </a:bodyPr>
+          <a:lstStyle/>
+          <a:p>
+            <a:r>
+              <a:rPr sz="2600" b="1">
+                <a:solidFill>
+                  <a:srgbClr val="0B3D2E"/>
+                </a:solidFill>
+              </a:rPr>
+              <a:t>❓ Preguntas frecuentes</a:t>
+            </a:r>
+          </a:p>
+        </p:txBody>
+      </p:sp>
+      <p:sp>
+        <p:nvSpPr>
+          <p:cNvPr id="3" name="TextBox 2"/>
+          <p:cNvSpPr txBox="1"/>
+          <p:nvPr/>
+        </p:nvSpPr>
+        <p:spPr>
+          <a:xfrm>
+            <a:off x="457200" y="1280160"/>
+            <a:ext cx="8229600" cy="4937760"/>
+          </a:xfrm>
+          <a:prstGeom prst="rect">
+            <a:avLst/>
+          </a:prstGeom>
+          <a:noFill/>
+        </p:spPr>
+        <p:txBody>
+          <a:bodyPr wrap="square">
+            <a:spAutoFit/>
+          </a:bodyPr>
+          <a:lstStyle/>
+          <a:p>
+            <a:pPr>
+              <a:spcAft>
+                <a:spcPts val="600"/>
+              </a:spcAft>
+            </a:pPr>
+            <a:r>
+              <a:rPr sz="1500">
+                <a:solidFill>
+                  <a:srgbClr val="22282E"/>
+                </a:solidFill>
+              </a:rPr>
+              <a:t>•  ❓ ¿Cómo separo un admin legítimo de un atacante?</a:t>
+            </a:r>
+          </a:p>
+          <a:p>
+            <a:pPr>
+              <a:spcAft>
+                <a:spcPts val="600"/>
+              </a:spcAft>
+            </a:pPr>
+            <a:r>
+              <a:rPr sz="1500">
+                <a:solidFill>
+                  <a:srgbClr val="22282E"/>
+                </a:solidFill>
+              </a:rPr>
+              <a:t>•  Con baseline y contexto: quién administra qué, desde dónde y cuándo. Un logon administrativo de una workstation a otra fuera de horario, sin ticket de cambio, es sospechoso aunque use credenciales…</a:t>
+            </a:r>
+          </a:p>
+          <a:p>
+            <a:pPr>
+              <a:spcAft>
+                <a:spcPts val="600"/>
+              </a:spcAft>
+            </a:pPr>
+            <a:r>
+              <a:rPr sz="1500">
+                <a:solidFill>
+                  <a:srgbClr val="22282E"/>
+                </a:solidFill>
+              </a:rPr>
+              <a:t>•  ❓ ¿Es suficiente el endpoint para detectar movimiento lateral?</a:t>
+            </a:r>
+          </a:p>
+          <a:p>
+            <a:pPr>
+              <a:spcAft>
+                <a:spcPts val="600"/>
+              </a:spcAft>
+            </a:pPr>
+            <a:r>
+              <a:rPr sz="1500">
+                <a:solidFill>
+                  <a:srgbClr val="22282E"/>
+                </a:solidFill>
+              </a:rPr>
+              <a:t>•  Ayuda mucho (Sysmon, logon events), pero correlacionar con la red (SMB, conexiones entre hosts) da la imagen completa y detecta lo que un host silenciado ocultaría.</a:t>
+            </a:r>
+          </a:p>
+          <a:p>
+            <a:pPr>
+              <a:spcAft>
+                <a:spcPts val="600"/>
+              </a:spcAft>
+            </a:pPr>
+            <a:r>
+              <a:rPr sz="1500">
+                <a:solidFill>
+                  <a:srgbClr val="22282E"/>
+                </a:solidFill>
+              </a:rPr>
+              <a:t>•  ❓ ¿Detecto Pass-the-Hash directamente?</a:t>
+            </a:r>
+          </a:p>
+          <a:p>
+            <a:pPr>
+              <a:spcAft>
+                <a:spcPts val="600"/>
+              </a:spcAft>
+            </a:pPr>
+            <a:r>
+              <a:rPr sz="1500">
+                <a:solidFill>
+                  <a:srgbClr val="22282E"/>
+                </a:solidFill>
+              </a:rPr>
+              <a:t>•  No hay un "evento PtH", pero su firma es un patrón: logon NTLM tipo 3 con credenciales explícitas (4648) en contextos donde se esperaría Kerberos. Se detecta por anomalía.</a:t>
+            </a:r>
+          </a:p>
+        </p:txBody>
+      </p:sp>
+    </p:spTree>
+  </p:cSld>
+  <p:clrMapOvr>
+    <a:masterClrMapping/>
+  </p:clrMapOvr>
+</p:sld>
+</file>
+
+<file path=ppt/slides/slide16.xml><?xml version="1.0" encoding="utf-8"?>
+<p:sld xmlns:a="http://schemas.openxmlformats.org/drawingml/2006/main" xmlns:p="http://schemas.openxmlformats.org/presentationml/2006/main" xmlns:r="http://schemas.openxmlformats.org/officeDocument/2006/relationships">
+  <p:cSld>
+    <p:spTree>
+      <p:nvGrpSpPr>
+        <p:cNvPr id="1" name=""/>
+        <p:cNvGrpSpPr/>
+        <p:nvPr/>
+      </p:nvGrpSpPr>
+      <p:grpSpPr/>
+      <p:sp>
+        <p:nvSpPr>
+          <p:cNvPr id="2" name="TextBox 1"/>
+          <p:cNvSpPr txBox="1"/>
+          <p:nvPr/>
+        </p:nvSpPr>
+        <p:spPr>
+          <a:xfrm>
+            <a:off x="457200" y="320040"/>
+            <a:ext cx="8229600" cy="822960"/>
+          </a:xfrm>
+          <a:prstGeom prst="rect">
+            <a:avLst/>
+          </a:prstGeom>
+          <a:noFill/>
+        </p:spPr>
+        <p:txBody>
+          <a:bodyPr wrap="square">
+            <a:spAutoFit/>
+          </a:bodyPr>
+          <a:lstStyle/>
+          <a:p>
+            <a:r>
+              <a:rPr sz="2600" b="1">
+                <a:solidFill>
+                  <a:srgbClr val="0B3D2E"/>
+                </a:solidFill>
+              </a:rPr>
+              <a:t>🔗 Referencias verificables y alcance</a:t>
+            </a:r>
+          </a:p>
+        </p:txBody>
+      </p:sp>
+      <p:sp>
+        <p:nvSpPr>
+          <p:cNvPr id="3" name="TextBox 2"/>
+          <p:cNvSpPr txBox="1"/>
+          <p:nvPr/>
+        </p:nvSpPr>
+        <p:spPr>
+          <a:xfrm>
+            <a:off x="457200" y="1280160"/>
+            <a:ext cx="8229600" cy="4937760"/>
+          </a:xfrm>
+          <a:prstGeom prst="rect">
+            <a:avLst/>
+          </a:prstGeom>
+          <a:noFill/>
+        </p:spPr>
+        <p:txBody>
+          <a:bodyPr wrap="square">
+            <a:spAutoFit/>
+          </a:bodyPr>
+          <a:lstStyle/>
+          <a:p>
+            <a:pPr>
+              <a:spcAft>
+                <a:spcPts val="600"/>
+              </a:spcAft>
+            </a:pPr>
+            <a:r>
+              <a:rPr sz="1500">
+                <a:solidFill>
+                  <a:srgbClr val="22282E"/>
+                </a:solidFill>
+              </a:rPr>
+              <a:t>•  MITRE ATT&amp;CK, Lateral Movement: fuente primaria para el objetivo táctico, sus técnicas y procedimientos documentados — &lt;https://attack.mitre.org/tactics/TA0008/&gt;</a:t>
+            </a:r>
+          </a:p>
+          <a:p>
+            <a:pPr>
+              <a:spcAft>
+                <a:spcPts val="600"/>
+              </a:spcAft>
+            </a:pPr>
+            <a:r>
+              <a:rPr sz="1500">
+                <a:solidFill>
+                  <a:srgbClr val="22282E"/>
+                </a:solidFill>
+              </a:rPr>
+              <a:t>•  MITRE ATT&amp;CK T1021, Remote Services: fuente primaria para RDP, SMB/Windows Admin Shares, WinRM, SSH y otras subtécnicas; no afirma que un único evento confirme movimiento lateral —…</a:t>
+            </a:r>
+          </a:p>
+          <a:p>
+            <a:pPr>
+              <a:spcAft>
+                <a:spcPts val="600"/>
+              </a:spcAft>
+            </a:pPr>
+            <a:r>
+              <a:rPr sz="1500">
+                <a:solidFill>
+                  <a:srgbClr val="22282E"/>
+                </a:solidFill>
+              </a:rPr>
+              <a:t>•  JPCERT/CC, Tool Analysis Result Sheet: investigación publicada con artefactos de herramientas y eventos de Windows; se usa para formular y probar observables concretos —…</a:t>
+            </a:r>
+          </a:p>
+          <a:p>
+            <a:pPr>
+              <a:spcAft>
+                <a:spcPts val="600"/>
+              </a:spcAft>
+            </a:pPr>
+            <a:r>
+              <a:rPr sz="1500">
+                <a:solidFill>
+                  <a:srgbClr val="22282E"/>
+                </a:solidFill>
+              </a:rPr>
+              <a:t>•  SpecterOps BloodHound: documentación oficial del producto para modelar relaciones de identidad y rutas; una ruta posible no prueba que haya sido utilizada — &lt;https://bloodhound.specterops.io/&gt;</a:t>
+            </a:r>
+          </a:p>
+          <a:p>
+            <a:pPr>
+              <a:spcAft>
+                <a:spcPts val="600"/>
+              </a:spcAft>
+            </a:pPr>
+            <a:r>
+              <a:rPr sz="1500">
+                <a:solidFill>
+                  <a:srgbClr val="22282E"/>
+                </a:solidFill>
+              </a:rPr>
+              <a:t>•  Murdoch, D. Blue Team Handbook: SOC, SIEM, and Threat Hunting Use Cases: bibliografía profesional complementaria.</a:t>
+            </a:r>
+          </a:p>
+        </p:txBody>
+      </p:sp>
+    </p:spTree>
+  </p:cSld>
+  <p:clrMapOvr>
+    <a:masterClrMapping/>
+  </p:clrMapOvr>
+</p:sld>
+</file>
+
+<file path=ppt/slides/slide17.xml><?xml version="1.0" encoding="utf-8"?>
+<p:sld xmlns:a="http://schemas.openxmlformats.org/drawingml/2006/main" xmlns:p="http://schemas.openxmlformats.org/presentationml/2006/main" xmlns:r="http://schemas.openxmlformats.org/officeDocument/2006/relationships">
+  <p:cSld>
+    <p:spTree>
+      <p:nvGrpSpPr>
+        <p:cNvPr id="1" name=""/>
+        <p:cNvGrpSpPr/>
+        <p:nvPr/>
+      </p:nvGrpSpPr>
+      <p:grpSpPr/>
+      <p:sp>
+        <p:nvSpPr>
+          <p:cNvPr id="2" name="TextBox 1"/>
+          <p:cNvSpPr txBox="1"/>
+          <p:nvPr/>
+        </p:nvSpPr>
+        <p:spPr>
+          <a:xfrm>
+            <a:off x="457200" y="274320"/>
+            <a:ext cx="8229600" cy="640080"/>
+          </a:xfrm>
+          <a:prstGeom prst="rect">
+            <a:avLst/>
+          </a:prstGeom>
+          <a:noFill/>
+        </p:spPr>
+        <p:txBody>
+          <a:bodyPr wrap="square">
+            <a:spAutoFit/>
+          </a:bodyPr>
+          <a:lstStyle/>
+          <a:p>
+            <a:r>
+              <a:rPr sz="2200" b="1">
+                <a:solidFill>
+                  <a:srgbClr val="0B3D2E"/>
+                </a:solidFill>
+              </a:rPr>
+              <a:t>Diagrama de la clase</a:t>
+            </a:r>
+          </a:p>
+        </p:txBody>
+      </p:sp>
+      <p:pic>
+        <p:nvPicPr>
+          <p:cNvPr id="3" name="Picture 2" descr="b95e269371de5806.png"/>
+          <p:cNvPicPr>
+            <a:picLocks noChangeAspect="1"/>
+          </p:cNvPicPr>
+          <p:nvPr/>
+        </p:nvPicPr>
+        <p:blipFill>
+          <a:blip r:embed="rId2"/>
+          <a:stretch>
+            <a:fillRect/>
+          </a:stretch>
+        </p:blipFill>
+        <p:spPr>
+          <a:xfrm>
+            <a:off x="457200" y="1163472"/>
+            <a:ext cx="8229600" cy="5171136"/>
+          </a:xfrm>
+          <a:prstGeom prst="rect">
+            <a:avLst/>
+          </a:prstGeom>
+        </p:spPr>
+      </p:pic>
     </p:spTree>
   </p:cSld>
   <p:clrMapOvr>
@@ -3698,7 +4374,7 @@
                   <a:srgbClr val="22282E"/>
                 </a:solidFill>
               </a:rPr>
-              <a:t>•  Detectar cómo un atacante se desplaza de un host comprometido a otros dentro de la red: PsExec/servicios remotos, WMI, WinRM, RDP, Pass-the-Hash y abuso de credenciales. Aprenderás qué huellas dejan estas técnicas en Event Logs, Sysmon y telemetría de red, y cómo distinguirlas de la administración legítima.</a:t>
+              <a:t>•  Detectar cómo un atacante se desplaza de un host comprometido a otros dentro de la red: PsExec/servicios remotos, WMI, WinRM, RDP, Pass-the-Hash y abuso de credenciales. Aprenderás qué huellas dejan…</a:t>
             </a:r>
           </a:p>
         </p:txBody>
@@ -4092,7 +4768,7 @@
                   <a:srgbClr val="0B3D2E"/>
                 </a:solidFill>
               </a:rPr>
-              <a:t>📖 Definiciones y características</a:t>
+              <a:t>🧠 Explicación en profundidad</a:t>
             </a:r>
           </a:p>
         </p:txBody>
@@ -4130,97 +4806,97 @@
                   <a:srgbClr val="22282E"/>
                 </a:solidFill>
               </a:rPr>
-              <a:t>•  Movimiento lateral: conjunto de técnicas para moverse por la red tras el compromiso inicial. Característica: usa credenciales y protocolos legítimos, difícil de separar del uso normal.</a:t>
-            </a:r>
-          </a:p>
-          <a:p>
-            <a:pPr>
-              <a:spcAft>
-                <a:spcPts val="600"/>
-              </a:spcAft>
-            </a:pPr>
-            <a:r>
-              <a:rPr sz="1500">
-                <a:solidFill>
-                  <a:srgbClr val="22282E"/>
-                </a:solidFill>
-              </a:rPr>
-              <a:t>•  PsExec: herramienta que ejecuta comandos remotos creando un servicio. Característica: deja Event 7045 (servicio instalado) y accesos SMB al admin$.</a:t>
-            </a:r>
-          </a:p>
-          <a:p>
-            <a:pPr>
-              <a:spcAft>
-                <a:spcPts val="600"/>
-              </a:spcAft>
-            </a:pPr>
-            <a:r>
-              <a:rPr sz="1500">
-                <a:solidFill>
-                  <a:srgbClr val="22282E"/>
-                </a:solidFill>
-              </a:rPr>
-              <a:t>•  WMI lateral: ejecución remota vía wmic/Win32Process. Característica: proceso hijo de WmiPrvSE.exe, poco ruido de servicio.</a:t>
-            </a:r>
-          </a:p>
-          <a:p>
-            <a:pPr>
-              <a:spcAft>
-                <a:spcPts val="600"/>
-              </a:spcAft>
-            </a:pPr>
-            <a:r>
-              <a:rPr sz="1500">
-                <a:solidFill>
-                  <a:srgbClr val="22282E"/>
-                </a:solidFill>
-              </a:rPr>
-              <a:t>•  WinRM: gestión remota vía PowerShell Remoting. Característica: procesos hijos de wsmprovhost.exe.</a:t>
-            </a:r>
-          </a:p>
-          <a:p>
-            <a:pPr>
-              <a:spcAft>
-                <a:spcPts val="600"/>
-              </a:spcAft>
-            </a:pPr>
-            <a:r>
-              <a:rPr sz="1500">
-                <a:solidFill>
-                  <a:srgbClr val="22282E"/>
-                </a:solidFill>
-              </a:rPr>
-              <a:t>•  Pass-the-Hash (PtH): autenticación con el hash NTLM sin conocer la contraseña. Característica: logon NTLM (4624 tipo 3) sin el correspondiente Kerberos esperado.</a:t>
-            </a:r>
-          </a:p>
-          <a:p>
-            <a:pPr>
-              <a:spcAft>
-                <a:spcPts val="600"/>
-              </a:spcAft>
-            </a:pPr>
-            <a:r>
-              <a:rPr sz="1500">
-                <a:solidFill>
-                  <a:srgbClr val="22282E"/>
-                </a:solidFill>
-              </a:rPr>
-              <a:t>•  Logon Type 3/10: red (SMB/WMI) e interactivo remoto (RDP). Característica: pistas para clasificar el tipo de acceso.</a:t>
-            </a:r>
-          </a:p>
-          <a:p>
-            <a:pPr>
-              <a:spcAft>
-                <a:spcPts val="600"/>
-              </a:spcAft>
-            </a:pPr>
-            <a:r>
-              <a:rPr sz="1500">
-                <a:solidFill>
-                  <a:srgbClr val="22282E"/>
-                </a:solidFill>
-              </a:rPr>
-              <a:t>•  Event 4648: logon con credenciales explícitas. Característica: frecuente en overpass-the-hash y uso de credenciales robadas.</a:t>
+              <a:t>•  Movimiento lateral es el uso de acceso obtenido para alcanzar otro sistema o identidad. RDP, SMB y WinRM también sostienen operaciones legítimas; el nombre de la herramienta no decide. La señal nace…</a:t>
+            </a:r>
+          </a:p>
+          <a:p>
+            <a:pPr>
+              <a:spcAft>
+                <a:spcPts val="600"/>
+              </a:spcAft>
+            </a:pPr>
+            <a:r>
+              <a:rPr sz="1500">
+                <a:solidFill>
+                  <a:srgbClr val="22282E"/>
+                </a:solidFill>
+              </a:rPr>
+              <a:t>•  Se correlacionan autenticación, servicio remoto y efecto: archivo escrito, servicio creado, proceso iniciado o conexión posterior. Se compara con grafos de administración permitida, horario, cuenta y…</a:t>
+            </a:r>
+          </a:p>
+          <a:p>
+            <a:pPr>
+              <a:spcAft>
+                <a:spcPts val="600"/>
+              </a:spcAft>
+            </a:pPr>
+            <a:r>
+              <a:rPr sz="1500">
+                <a:solidFill>
+                  <a:srgbClr val="22282E"/>
+                </a:solidFill>
+              </a:rPr>
+              <a:t>•  Una administración legítima suele seguir caminos: jump host, cuenta dedicada, ventana y conjunto de destinos. El movimiento lateral rompe o amplía esas relaciones. Una cuenta de soporte que accede…</a:t>
+            </a:r>
+          </a:p>
+          <a:p>
+            <a:pPr>
+              <a:spcAft>
+                <a:spcPts val="600"/>
+              </a:spcAft>
+            </a:pPr>
+            <a:r>
+              <a:rPr sz="1500">
+                <a:solidFill>
+                  <a:srgbClr val="22282E"/>
+                </a:solidFill>
+              </a:rPr>
+              <a:t>•  La rareza aislada no basta. Un nuevo servidor produce aristas nuevas; una migración cambia patrones. Se enriquece con criticidad, privilegio, cambio aprobado y actividad posterior. La fuerza de la…</a:t>
+            </a:r>
+          </a:p>
+          <a:p>
+            <a:pPr>
+              <a:spcAft>
+                <a:spcPts val="600"/>
+              </a:spcAft>
+            </a:pPr>
+            <a:r>
+              <a:rPr sz="1500">
+                <a:solidFill>
+                  <a:srgbClr val="22282E"/>
+                </a:solidFill>
+              </a:rPr>
+              <a:t>•  RDP se investiga con autenticación, tipo de sesión, origen, eventos de sesión y procesos en el destino. SMB puede mostrar acceso a shares administrativos y escritura; si después aparece un servicio…</a:t>
+            </a:r>
+          </a:p>
+          <a:p>
+            <a:pPr>
+              <a:spcAft>
+                <a:spcPts val="600"/>
+              </a:spcAft>
+            </a:pPr>
+            <a:r>
+              <a:rPr sz="1500">
+                <a:solidFill>
+                  <a:srgbClr val="22282E"/>
+                </a:solidFill>
+              </a:rPr>
+              <a:t>•  El sequenceDiagram enseña que identidad y destino ven fragmentos. El servicio de identidad valida credenciales; el host destino observa sesión y ejecución; red confirma relación. El SIEM une por…</a:t>
+            </a:r>
+          </a:p>
+          <a:p>
+            <a:pPr>
+              <a:spcAft>
+                <a:spcPts val="600"/>
+              </a:spcAft>
+            </a:pPr>
+            <a:r>
+              <a:rPr sz="1500">
+                <a:solidFill>
+                  <a:srgbClr val="22282E"/>
+                </a:solidFill>
+              </a:rPr>
+              <a:t>•  Al confirmar un caso se pregunta dónde más se usaron cuenta, origen y mecanismo, qué credenciales pudieron exponerse y qué destino se volvió nuevo origen. El movimiento lateral forma cadenas…</a:t>
             </a:r>
           </a:p>
         </p:txBody>
@@ -4271,7 +4947,7 @@
                   <a:srgbClr val="0B3D2E"/>
                 </a:solidFill>
               </a:rPr>
-              <a:t>🧰 Herramientas y preparación</a:t>
+              <a:t>📔 Glosario</a:t>
             </a:r>
           </a:p>
         </p:txBody>
@@ -4309,82 +4985,97 @@
                   <a:srgbClr val="22282E"/>
                 </a:solidFill>
               </a:rPr>
-              <a:t>•  En laboratorio aislado con un dominio de pruebas:</a:t>
-            </a:r>
-          </a:p>
-          <a:p>
-            <a:pPr>
-              <a:spcAft>
-                <a:spcPts val="600"/>
-              </a:spcAft>
-            </a:pPr>
-            <a:r>
-              <a:rPr sz="1500">
-                <a:solidFill>
-                  <a:srgbClr val="22282E"/>
-                </a:solidFill>
-              </a:rPr>
-              <a:t>•  Sysmon y auditoría avanzada en varios Windows unidos a un AD de laboratorio.</a:t>
-            </a:r>
-          </a:p>
-          <a:p>
-            <a:pPr>
-              <a:spcAft>
-                <a:spcPts val="600"/>
-              </a:spcAft>
-            </a:pPr>
-            <a:r>
-              <a:rPr sz="1500">
-                <a:solidFill>
-                  <a:srgbClr val="22282E"/>
-                </a:solidFill>
-              </a:rPr>
-              <a:t>•  Herramientas para generar la telemetría: PsExec (Sysinternals), wmic, PowerShell Remoting; y, con fines de laboratorio, utilidades como Mimikatz/CrackMapExec para simular PtH.</a:t>
-            </a:r>
-          </a:p>
-          <a:p>
-            <a:pPr>
-              <a:spcAft>
-                <a:spcPts val="600"/>
-              </a:spcAft>
-            </a:pPr>
-            <a:r>
-              <a:rPr sz="1500">
-                <a:solidFill>
-                  <a:srgbClr val="22282E"/>
-                </a:solidFill>
-              </a:rPr>
-              <a:t>•  Tu SIEM recibiendo los eventos de todos los hosts.</a:t>
-            </a:r>
-          </a:p>
-          <a:p>
-            <a:pPr>
-              <a:spcAft>
-                <a:spcPts val="600"/>
-              </a:spcAft>
-            </a:pPr>
-            <a:r>
-              <a:rPr sz="1500">
-                <a:solidFill>
-                  <a:srgbClr val="22282E"/>
-                </a:solidFill>
-              </a:rPr>
-              <a:t>•  Opcional: BloodHound para razonar sobre rutas de ataque de identidad.</a:t>
-            </a:r>
-          </a:p>
-          <a:p>
-            <a:pPr>
-              <a:spcAft>
-                <a:spcPts val="600"/>
-              </a:spcAft>
-            </a:pPr>
-            <a:r>
-              <a:rPr sz="1500">
-                <a:solidFill>
-                  <a:srgbClr val="22282E"/>
-                </a:solidFill>
-              </a:rPr>
-              <a:t>•  Ejecuta las técnicas ofensivas solo contra tus propias máquinas y con conocimiento pleno.</a:t>
+              <a:t>•  Movimiento lateral: desplazamiento hacia otros recursos.</a:t>
+            </a:r>
+          </a:p>
+          <a:p>
+            <a:pPr>
+              <a:spcAft>
+                <a:spcPts val="600"/>
+              </a:spcAft>
+            </a:pPr>
+            <a:r>
+              <a:rPr sz="1500">
+                <a:solidFill>
+                  <a:srgbClr val="22282E"/>
+                </a:solidFill>
+              </a:rPr>
+              <a:t>•  Remote Services: técnica ATT&amp;CK T1021.</a:t>
+            </a:r>
+          </a:p>
+          <a:p>
+            <a:pPr>
+              <a:spcAft>
+                <a:spcPts val="600"/>
+              </a:spcAft>
+            </a:pPr>
+            <a:r>
+              <a:rPr sz="1500">
+                <a:solidFill>
+                  <a:srgbClr val="22282E"/>
+                </a:solidFill>
+              </a:rPr>
+              <a:t>•  Logon remoto: sesión iniciada desde otro sistema.</a:t>
+            </a:r>
+          </a:p>
+          <a:p>
+            <a:pPr>
+              <a:spcAft>
+                <a:spcPts val="600"/>
+              </a:spcAft>
+            </a:pPr>
+            <a:r>
+              <a:rPr sz="1500">
+                <a:solidFill>
+                  <a:srgbClr val="22282E"/>
+                </a:solidFill>
+              </a:rPr>
+              <a:t>•  Cuenta privilegiada: identidad con autoridad elevada.</a:t>
+            </a:r>
+          </a:p>
+          <a:p>
+            <a:pPr>
+              <a:spcAft>
+                <a:spcPts val="600"/>
+              </a:spcAft>
+            </a:pPr>
+            <a:r>
+              <a:rPr sz="1500">
+                <a:solidFill>
+                  <a:srgbClr val="22282E"/>
+                </a:solidFill>
+              </a:rPr>
+              <a:t>•  Admin share: recurso SMB administrativo.</a:t>
+            </a:r>
+          </a:p>
+          <a:p>
+            <a:pPr>
+              <a:spcAft>
+                <a:spcPts val="600"/>
+              </a:spcAft>
+            </a:pPr>
+            <a:r>
+              <a:rPr sz="1500">
+                <a:solidFill>
+                  <a:srgbClr val="22282E"/>
+                </a:solidFill>
+              </a:rPr>
+              <a:t>•  Grafo de acceso: relaciones permitidas entre identidades y activos.</a:t>
+            </a:r>
+          </a:p>
+          <a:p>
+            <a:pPr>
+              <a:spcAft>
+                <a:spcPts val="600"/>
+              </a:spcAft>
+            </a:pPr>
+            <a:r>
+              <a:rPr sz="1500">
+                <a:solidFill>
+                  <a:srgbClr val="22282E"/>
+                </a:solidFill>
+              </a:rPr>
+              <a:t>•  Blast radius: alcance potencial del compromiso.</a:t>
             </a:r>
           </a:p>
         </p:txBody>
@@ -4435,7 +5126,7 @@
                   <a:srgbClr val="0B3D2E"/>
                 </a:solidFill>
               </a:rPr>
-              <a:t>🧪 Laboratorio guiado — Sigue el rastro lateral</a:t>
+              <a:t>📖 Definiciones y características</a:t>
             </a:r>
           </a:p>
         </p:txBody>
@@ -4473,97 +5164,97 @@
                   <a:srgbClr val="22282E"/>
                 </a:solidFill>
               </a:rPr>
-              <a:t>•  Prepara el dominio. 1 DC + 2 workstations de laboratorio con Sysmon y auditoría de logon habilitada.</a:t>
-            </a:r>
-          </a:p>
-          <a:p>
-            <a:pPr>
-              <a:spcAft>
-                <a:spcPts val="600"/>
-              </a:spcAft>
-            </a:pPr>
-            <a:r>
-              <a:rPr sz="1500">
-                <a:solidFill>
-                  <a:srgbClr val="22282E"/>
-                </a:solidFill>
-              </a:rPr>
-              <a:t>•  Genera PsExec. Ejecuta un comando remoto benigno con PsExec desde host A a host B y observa: Event 7045 (servicio), 4624 tipo 3, accesos a \\B\ADMIN$.</a:t>
-            </a:r>
-          </a:p>
-          <a:p>
-            <a:pPr>
-              <a:spcAft>
-                <a:spcPts val="600"/>
-              </a:spcAft>
-            </a:pPr>
-            <a:r>
-              <a:rPr sz="1500">
-                <a:solidFill>
-                  <a:srgbClr val="22282E"/>
-                </a:solidFill>
-              </a:rPr>
-              <a:t>•  Genera WMI. Lanza wmic /node:B process call create "cmd /c whoami" y localiza el proceso hijo de WmiPrvSE.exe en Sysmon Event 1.</a:t>
-            </a:r>
-          </a:p>
-          <a:p>
-            <a:pPr>
-              <a:spcAft>
-                <a:spcPts val="600"/>
-              </a:spcAft>
-            </a:pPr>
-            <a:r>
-              <a:rPr sz="1500">
-                <a:solidFill>
-                  <a:srgbClr val="22282E"/>
-                </a:solidFill>
-              </a:rPr>
-              <a:t>•  Genera WinRM. Con Invoke-Command -ComputerName B observa procesos bajo wsmprovhost.exe.</a:t>
-            </a:r>
-          </a:p>
-          <a:p>
-            <a:pPr>
-              <a:spcAft>
-                <a:spcPts val="600"/>
-              </a:spcAft>
-            </a:pPr>
-            <a:r>
-              <a:rPr sz="1500">
-                <a:solidFill>
-                  <a:srgbClr val="22282E"/>
-                </a:solidFill>
-              </a:rPr>
-              <a:t>•  Simula PtH. En laboratorio, autentícate con hash a host B y detecta el 4624 NTLM tipo 3 sin actividad Kerberos previa coherente y con 4648.</a:t>
-            </a:r>
-          </a:p>
-          <a:p>
-            <a:pPr>
-              <a:spcAft>
-                <a:spcPts val="600"/>
-              </a:spcAft>
-            </a:pPr>
-            <a:r>
-              <a:rPr sz="1500">
-                <a:solidFill>
-                  <a:srgbClr val="22282E"/>
-                </a:solidFill>
-              </a:rPr>
-              <a:t>•  Detecta RDP. Inicia una sesión RDP y localiza 4624 tipo 10 más los eventos TerminalServices.</a:t>
-            </a:r>
-          </a:p>
-          <a:p>
-            <a:pPr>
-              <a:spcAft>
-                <a:spcPts val="600"/>
-              </a:spcAft>
-            </a:pPr>
-            <a:r>
-              <a:rPr sz="1500">
-                <a:solidFill>
-                  <a:srgbClr val="22282E"/>
-                </a:solidFill>
-              </a:rPr>
-              <a:t>•  Construye detecciones. Escribe reglas para: instalación de servicio remoto inusual, proceso hijo de WmiPrvSE lanzando shells, y logon NTLM tipo 3 desde workstation a workstation (patrón raro).</a:t>
+              <a:t>•  Movimiento lateral: conjunto de técnicas para moverse por la red tras el compromiso inicial. Característica: usa credenciales y protocolos legítimos, difícil de separar del uso normal.</a:t>
+            </a:r>
+          </a:p>
+          <a:p>
+            <a:pPr>
+              <a:spcAft>
+                <a:spcPts val="600"/>
+              </a:spcAft>
+            </a:pPr>
+            <a:r>
+              <a:rPr sz="1500">
+                <a:solidFill>
+                  <a:srgbClr val="22282E"/>
+                </a:solidFill>
+              </a:rPr>
+              <a:t>•  PsExec: herramienta que ejecuta comandos remotos creando un servicio. Característica: deja Event 7045 (servicio instalado) y accesos SMB al admin$.</a:t>
+            </a:r>
+          </a:p>
+          <a:p>
+            <a:pPr>
+              <a:spcAft>
+                <a:spcPts val="600"/>
+              </a:spcAft>
+            </a:pPr>
+            <a:r>
+              <a:rPr sz="1500">
+                <a:solidFill>
+                  <a:srgbClr val="22282E"/>
+                </a:solidFill>
+              </a:rPr>
+              <a:t>•  WMI lateral: ejecución remota vía wmic/Win32Process. Característica: proceso hijo de WmiPrvSE.exe, poco ruido de servicio.</a:t>
+            </a:r>
+          </a:p>
+          <a:p>
+            <a:pPr>
+              <a:spcAft>
+                <a:spcPts val="600"/>
+              </a:spcAft>
+            </a:pPr>
+            <a:r>
+              <a:rPr sz="1500">
+                <a:solidFill>
+                  <a:srgbClr val="22282E"/>
+                </a:solidFill>
+              </a:rPr>
+              <a:t>•  WinRM: gestión remota vía PowerShell Remoting. Característica: procesos hijos de wsmprovhost.exe.</a:t>
+            </a:r>
+          </a:p>
+          <a:p>
+            <a:pPr>
+              <a:spcAft>
+                <a:spcPts val="600"/>
+              </a:spcAft>
+            </a:pPr>
+            <a:r>
+              <a:rPr sz="1500">
+                <a:solidFill>
+                  <a:srgbClr val="22282E"/>
+                </a:solidFill>
+              </a:rPr>
+              <a:t>•  Pass-the-Hash (PtH): autenticación con el hash NTLM sin conocer la contraseña. Característica: logon NTLM (4624 tipo 3) sin el correspondiente Kerberos esperado.</a:t>
+            </a:r>
+          </a:p>
+          <a:p>
+            <a:pPr>
+              <a:spcAft>
+                <a:spcPts val="600"/>
+              </a:spcAft>
+            </a:pPr>
+            <a:r>
+              <a:rPr sz="1500">
+                <a:solidFill>
+                  <a:srgbClr val="22282E"/>
+                </a:solidFill>
+              </a:rPr>
+              <a:t>•  Logon Type 3/10: red (SMB/WMI) e interactivo remoto (RDP). Característica: pistas para clasificar el tipo de acceso.</a:t>
+            </a:r>
+          </a:p>
+          <a:p>
+            <a:pPr>
+              <a:spcAft>
+                <a:spcPts val="600"/>
+              </a:spcAft>
+            </a:pPr>
+            <a:r>
+              <a:rPr sz="1500">
+                <a:solidFill>
+                  <a:srgbClr val="22282E"/>
+                </a:solidFill>
+              </a:rPr>
+              <a:t>•  Event 4648: logon con credenciales explícitas. Característica: frecuente en overpass-the-hash y uso de credenciales robadas.</a:t>
             </a:r>
           </a:p>
         </p:txBody>
@@ -4614,7 +5305,7 @@
                   <a:srgbClr val="0B3D2E"/>
                 </a:solidFill>
               </a:rPr>
-              <a:t>✍️ Ejercicios</a:t>
+              <a:t>🔍 Secuencia resuelta — acceso SMB y servicio remoto</a:t>
             </a:r>
           </a:p>
         </p:txBody>
@@ -4652,82 +5343,37 @@
                   <a:srgbClr val="22282E"/>
                 </a:solidFill>
               </a:rPr>
-              <a:t>•  Mapea 5 técnicas de movimiento lateral a sus Event IDs/artefactos.</a:t>
-            </a:r>
-          </a:p>
-          <a:p>
-            <a:pPr>
-              <a:spcAft>
-                <a:spcPts val="600"/>
-              </a:spcAft>
-            </a:pPr>
-            <a:r>
-              <a:rPr sz="1500">
-                <a:solidFill>
-                  <a:srgbClr val="22282E"/>
-                </a:solidFill>
-              </a:rPr>
-              <a:t>•  Escribe una detección de "workstation-a-workstation SMB admin$" (patrón inusual).</a:t>
-            </a:r>
-          </a:p>
-          <a:p>
-            <a:pPr>
-              <a:spcAft>
-                <a:spcPts val="600"/>
-              </a:spcAft>
-            </a:pPr>
-            <a:r>
-              <a:rPr sz="1500">
-                <a:solidFill>
-                  <a:srgbClr val="22282E"/>
-                </a:solidFill>
-              </a:rPr>
-              <a:t>•  Diferencia el rastro de PsExec, WMI y WinRM en una tabla.</a:t>
-            </a:r>
-          </a:p>
-          <a:p>
-            <a:pPr>
-              <a:spcAft>
-                <a:spcPts val="600"/>
-              </a:spcAft>
-            </a:pPr>
-            <a:r>
-              <a:rPr sz="1500">
-                <a:solidFill>
-                  <a:srgbClr val="22282E"/>
-                </a:solidFill>
-              </a:rPr>
-              <a:t>•  Explica cómo detectarías Pass-the-Hash con eventos de logon.</a:t>
-            </a:r>
-          </a:p>
-          <a:p>
-            <a:pPr>
-              <a:spcAft>
-                <a:spcPts val="600"/>
-              </a:spcAft>
-            </a:pPr>
-            <a:r>
-              <a:rPr sz="1500">
-                <a:solidFill>
-                  <a:srgbClr val="22282E"/>
-                </a:solidFill>
-              </a:rPr>
-              <a:t>•  Diseña una baseline de administración legítima para tu entorno.</a:t>
-            </a:r>
-          </a:p>
-          <a:p>
-            <a:pPr>
-              <a:spcAft>
-                <a:spcPts val="600"/>
-              </a:spcAft>
-            </a:pPr>
-            <a:r>
-              <a:rPr sz="1500">
-                <a:solidFill>
-                  <a:srgbClr val="22282E"/>
-                </a:solidFill>
-              </a:rPr>
-              <a:t>•  Usa un grafo de logons para detectar un pivote anómalo.</a:t>
+              <a:t>•  Una estación de usuario autentica una cuenta administrativa contra un servidor que normalmente solo recibe gestión desde el bastión. Minutos después aparecen acceso a un share administrativo…</a:t>
+            </a:r>
+          </a:p>
+          <a:p>
+            <a:pPr>
+              <a:spcAft>
+                <a:spcPts val="600"/>
+              </a:spcAft>
+            </a:pPr>
+            <a:r>
+              <a:rPr sz="1500">
+                <a:solidFill>
+                  <a:srgbClr val="22282E"/>
+                </a:solidFill>
+              </a:rPr>
+              <a:t>•  Se construye un grafo con cuenta, estación y servidor. La investigación busca la misma cuenta en otros destinos y comprueba si el servidor afectado originó conexiones nuevas. También revisa si hubo…</a:t>
+            </a:r>
+          </a:p>
+          <a:p>
+            <a:pPr>
+              <a:spcAft>
+                <a:spcPts val="600"/>
+              </a:spcAft>
+            </a:pPr>
+            <a:r>
+              <a:rPr sz="1500">
+                <a:solidFill>
+                  <a:srgbClr val="22282E"/>
+                </a:solidFill>
+              </a:rPr>
+              <a:t>•  La prueba de laboratorio reproduce una variante SMB autorizada y una desde origen inesperado. Se valida qué datos sustentan autenticación, transferencia y ejecución. El resultado solo acredita esa…</a:t>
             </a:r>
           </a:p>
         </p:txBody>
@@ -4778,7 +5424,7 @@
                   <a:srgbClr val="0B3D2E"/>
                 </a:solidFill>
               </a:rPr>
-              <a:t>📝 Reto verificable</a:t>
+              <a:t>✅ Criterio de dominio</a:t>
             </a:r>
           </a:p>
         </p:txBody>
@@ -4816,7 +5462,7 @@
                   <a:srgbClr val="22282E"/>
                 </a:solidFill>
               </a:rPr>
-              <a:t>•  Genera y detecta al menos tres técnicas de movimiento lateral distintas en tu dominio de laboratorio, entregando por cada una la telemetría, la detección y la técnica ATT&amp;CK. Criterio de aceptación: cada detección dispara con la técnica correspondiente y no con la administración legítima de tu baseline; distingues correctamente PsExec de WMI de WinRM por sus artefactos característicos.</a:t>
+              <a:t>•  El alumno debe explicar la cadena completa, identificar relaciones administrativas normales, ampliar alcance en ambas direcciones y mapear a la subtécnica exacta sin declarar cobertura total de T1021.</a:t>
             </a:r>
           </a:p>
         </p:txBody>
